--- a/courseware/DSA_CH11_Indexing.pptx
+++ b/courseware/DSA_CH11_Indexing.pptx
@@ -3323,7 +3323,7 @@
                 <a:latin typeface="Segoe UI"/>
                 <a:ea typeface="微软雅黑"/>
               </a:rPr>
-              <a:t>现代化重制版讲义　代码按 C++17 重写，全部可编译、可运行</a:t>
+              <a:t>现代化重制版讲义　代码按 C++17 重写；code/ 全部单元双档编译运行通过</a:t>
             </a:r>
           </a:p>
         </p:txBody>
@@ -11876,7 +11876,7 @@
                 <a:latin typeface="Segoe UI"/>
                 <a:ea typeface="微软雅黑"/>
               </a:rPr>
-              <a:t>习题（完整题面与参考答案见同名讲义）</a:t>
+              <a:t>习题选讲</a:t>
             </a:r>
           </a:p>
         </p:txBody>
@@ -11955,11 +11955,11 @@
                 <a:spcPts val="0"/>
               </a:spcBef>
               <a:spcAft>
-                <a:spcPts val="1240"/>
-              </a:spcAft>
-            </a:pPr>
-            <a:r>
-              <a:rPr sz="2000" b="0" i="0">
+                <a:spcPts val="1178"/>
+              </a:spcAft>
+            </a:pPr>
+            <a:r>
+              <a:rPr sz="1900" b="0" i="0">
                 <a:solidFill>
                   <a:srgbClr val="242A33"/>
                 </a:solidFill>
@@ -11969,7 +11969,7 @@
               <a:t>•  </a:t>
             </a:r>
             <a:r>
-              <a:rPr sz="2000" b="1" i="0">
+              <a:rPr sz="1900" b="1" i="0">
                 <a:solidFill>
                   <a:srgbClr val="12395B"/>
                 </a:solidFill>
@@ -11979,7 +11979,7 @@
               <a:t>索引</a:t>
             </a:r>
             <a:r>
-              <a:rPr sz="2000" b="0" i="0">
+              <a:rPr sz="1900" b="0" i="0">
                 <a:solidFill>
                   <a:srgbClr val="242A33"/>
                 </a:solidFill>
@@ -11998,11 +11998,11 @@
                 <a:spcPts val="0"/>
               </a:spcBef>
               <a:spcAft>
-                <a:spcPts val="1240"/>
-              </a:spcAft>
-            </a:pPr>
-            <a:r>
-              <a:rPr sz="2000" b="0" i="0">
+                <a:spcPts val="1178"/>
+              </a:spcAft>
+            </a:pPr>
+            <a:r>
+              <a:rPr sz="1900" b="0" i="0">
                 <a:solidFill>
                   <a:srgbClr val="242A33"/>
                 </a:solidFill>
@@ -12012,7 +12012,7 @@
               <a:t>•  </a:t>
             </a:r>
             <a:r>
-              <a:rPr sz="2000" b="1" i="0">
+              <a:rPr sz="1900" b="1" i="0">
                 <a:solidFill>
                   <a:srgbClr val="12395B"/>
                 </a:solidFill>
@@ -12022,7 +12022,7 @@
               <a:t>扇出</a:t>
             </a:r>
             <a:r>
-              <a:rPr sz="2000" b="0" i="0">
+              <a:rPr sz="1900" b="0" i="0">
                 <a:solidFill>
                   <a:srgbClr val="242A33"/>
                 </a:solidFill>
@@ -12041,11 +12041,11 @@
                 <a:spcPts val="0"/>
               </a:spcBef>
               <a:spcAft>
-                <a:spcPts val="1240"/>
-              </a:spcAft>
-            </a:pPr>
-            <a:r>
-              <a:rPr sz="2000" b="0" i="0">
+                <a:spcPts val="1178"/>
+              </a:spcAft>
+            </a:pPr>
+            <a:r>
+              <a:rPr sz="1900" b="0" i="0">
                 <a:solidFill>
                   <a:srgbClr val="242A33"/>
                 </a:solidFill>
@@ -12055,7 +12055,7 @@
               <a:t>•  </a:t>
             </a:r>
             <a:r>
-              <a:rPr sz="2000" b="1" i="0">
+              <a:rPr sz="1900" b="1" i="0">
                 <a:solidFill>
                   <a:srgbClr val="12395B"/>
                 </a:solidFill>
@@ -12065,7 +12065,7 @@
               <a:t>B 树</a:t>
             </a:r>
             <a:r>
-              <a:rPr sz="2000" b="0" i="0">
+              <a:rPr sz="1900" b="0" i="0">
                 <a:solidFill>
                   <a:srgbClr val="242A33"/>
                 </a:solidFill>
@@ -12084,11 +12084,11 @@
                 <a:spcPts val="0"/>
               </a:spcBef>
               <a:spcAft>
-                <a:spcPts val="1240"/>
-              </a:spcAft>
-            </a:pPr>
-            <a:r>
-              <a:rPr sz="2000" b="0" i="0">
+                <a:spcPts val="1178"/>
+              </a:spcAft>
+            </a:pPr>
+            <a:r>
+              <a:rPr sz="1900" b="0" i="0">
                 <a:solidFill>
                   <a:srgbClr val="242A33"/>
                 </a:solidFill>
@@ -12098,7 +12098,7 @@
               <a:t>•  </a:t>
             </a:r>
             <a:r>
-              <a:rPr sz="2000" b="1" i="0">
+              <a:rPr sz="1900" b="1" i="0">
                 <a:solidFill>
                   <a:srgbClr val="12395B"/>
                 </a:solidFill>
@@ -12108,7 +12108,7 @@
               <a:t>证明</a:t>
             </a:r>
             <a:r>
-              <a:rPr sz="2000" b="0" i="0">
+              <a:rPr sz="1900" b="0" i="0">
                 <a:solidFill>
                   <a:srgbClr val="242A33"/>
                 </a:solidFill>
@@ -12118,7 +12118,7 @@
               <a:t>　推导 </a:t>
             </a:r>
             <a:r>
-              <a:rPr sz="1879" b="0" i="0">
+              <a:rPr sz="1786" b="0" i="0">
                 <a:solidFill>
                   <a:srgbClr val="242A33"/>
                 </a:solidFill>
@@ -12128,7 +12128,7 @@
               <a:t>I ≤ 1 + log_⌈m/2⌉((N+1)/2)</a:t>
             </a:r>
             <a:r>
-              <a:rPr sz="2000" b="0" i="0">
+              <a:rPr sz="1900" b="0" i="0">
                 <a:solidFill>
                   <a:srgbClr val="242A33"/>
                 </a:solidFill>
@@ -12147,11 +12147,11 @@
                 <a:spcPts val="0"/>
               </a:spcBef>
               <a:spcAft>
-                <a:spcPts val="1240"/>
-              </a:spcAft>
-            </a:pPr>
-            <a:r>
-              <a:rPr sz="2000" b="0" i="0">
+                <a:spcPts val="1178"/>
+              </a:spcAft>
+            </a:pPr>
+            <a:r>
+              <a:rPr sz="1900" b="0" i="0">
                 <a:solidFill>
                   <a:srgbClr val="242A33"/>
                 </a:solidFill>
@@ -12161,7 +12161,7 @@
               <a:t>•  </a:t>
             </a:r>
             <a:r>
-              <a:rPr sz="2000" b="1" i="0">
+              <a:rPr sz="1900" b="1" i="0">
                 <a:solidFill>
                   <a:srgbClr val="12395B"/>
                 </a:solidFill>
@@ -12171,7 +12171,7 @@
               <a:t>对比</a:t>
             </a:r>
             <a:r>
-              <a:rPr sz="2000" b="0" i="0">
+              <a:rPr sz="1900" b="0" i="0">
                 <a:solidFill>
                   <a:srgbClr val="242A33"/>
                 </a:solidFill>
@@ -12190,11 +12190,11 @@
                 <a:spcPts val="0"/>
               </a:spcBef>
               <a:spcAft>
-                <a:spcPts val="1240"/>
-              </a:spcAft>
-            </a:pPr>
-            <a:r>
-              <a:rPr sz="2000" b="0" i="0">
+                <a:spcPts val="1178"/>
+              </a:spcAft>
+            </a:pPr>
+            <a:r>
+              <a:rPr sz="1900" b="0" i="0">
                 <a:solidFill>
                   <a:srgbClr val="242A33"/>
                 </a:solidFill>
@@ -12204,7 +12204,7 @@
               <a:t>•  </a:t>
             </a:r>
             <a:r>
-              <a:rPr sz="2000" b="1" i="0">
+              <a:rPr sz="1900" b="1" i="0">
                 <a:solidFill>
                   <a:srgbClr val="12395B"/>
                 </a:solidFill>
@@ -12214,7 +12214,7 @@
               <a:t>倒排</a:t>
             </a:r>
             <a:r>
-              <a:rPr sz="2000" b="0" i="0">
+              <a:rPr sz="1900" b="0" i="0">
                 <a:solidFill>
                   <a:srgbClr val="242A33"/>
                 </a:solidFill>
@@ -12233,11 +12233,11 @@
                 <a:spcPts val="0"/>
               </a:spcBef>
               <a:spcAft>
-                <a:spcPts val="1240"/>
-              </a:spcAft>
-            </a:pPr>
-            <a:r>
-              <a:rPr sz="2000" b="0" i="0">
+                <a:spcPts val="1178"/>
+              </a:spcAft>
+            </a:pPr>
+            <a:r>
+              <a:rPr sz="1900" b="0" i="0">
                 <a:solidFill>
                   <a:srgbClr val="242A33"/>
                 </a:solidFill>
@@ -12247,7 +12247,7 @@
               <a:t>•  </a:t>
             </a:r>
             <a:r>
-              <a:rPr sz="2000" b="1" i="0">
+              <a:rPr sz="1900" b="1" i="0">
                 <a:solidFill>
                   <a:srgbClr val="12395B"/>
                 </a:solidFill>
@@ -12257,7 +12257,7 @@
               <a:t>上机</a:t>
             </a:r>
             <a:r>
-              <a:rPr sz="2000" b="0" i="0">
+              <a:rPr sz="1900" b="0" i="0">
                 <a:solidFill>
                   <a:srgbClr val="242A33"/>
                 </a:solidFill>
@@ -12267,7 +12267,7 @@
               <a:t>　用 </a:t>
             </a:r>
             <a:r>
-              <a:rPr sz="1879" b="0" i="0">
+              <a:rPr sz="1786" b="0" i="0">
                 <a:solidFill>
                   <a:srgbClr val="242A33"/>
                 </a:solidFill>
@@ -12277,7 +12277,7 @@
               <a:t>code/ch11/linear_index</a:t>
             </a:r>
             <a:r>
-              <a:rPr sz="2000" b="0" i="0">
+              <a:rPr sz="1900" b="0" i="0">
                 <a:solidFill>
                   <a:srgbClr val="242A33"/>
                 </a:solidFill>
@@ -12285,6 +12285,79 @@
                 <a:ea typeface="微软雅黑"/>
               </a:rPr>
               <a:t> 量出「每索引页项数 → 层数 → 页读次数」的关系曲线</a:t>
+            </a:r>
+          </a:p>
+          <a:p>
+            <a:pPr algn="l">
+              <a:lnSpc>
+                <a:spcPct val="132000"/>
+              </a:lnSpc>
+              <a:spcBef>
+                <a:spcPts val="0"/>
+              </a:spcBef>
+              <a:spcAft>
+                <a:spcPts val="1178"/>
+              </a:spcAft>
+            </a:pPr>
+            <a:r>
+              <a:rPr sz="1900" b="0" i="0">
+                <a:solidFill>
+                  <a:srgbClr val="242A33"/>
+                </a:solidFill>
+                <a:latin typeface="Segoe UI"/>
+                <a:ea typeface="微软雅黑"/>
+              </a:rPr>
+              <a:t>•  </a:t>
+            </a:r>
+            <a:r>
+              <a:rPr sz="1900" b="1" i="0">
+                <a:solidFill>
+                  <a:srgbClr val="12395B"/>
+                </a:solidFill>
+                <a:latin typeface="Segoe UI"/>
+                <a:ea typeface="微软雅黑"/>
+              </a:rPr>
+              <a:t>这一页和讲义里都是选讲。</a:t>
+            </a:r>
+            <a:r>
+              <a:rPr sz="1900" b="0" i="0">
+                <a:solidFill>
+                  <a:srgbClr val="242A33"/>
+                </a:solidFill>
+                <a:latin typeface="Segoe UI"/>
+                <a:ea typeface="微软雅黑"/>
+              </a:rPr>
+              <a:t> 原书全部 </a:t>
+            </a:r>
+            <a:r>
+              <a:rPr sz="1900" b="1" i="0">
+                <a:solidFill>
+                  <a:srgbClr val="12395B"/>
+                </a:solidFill>
+                <a:latin typeface="Segoe UI"/>
+                <a:ea typeface="微软雅黑"/>
+              </a:rPr>
+              <a:t>345 道</a:t>
+            </a:r>
+            <a:r>
+              <a:rPr sz="1900" b="0" i="0">
+                <a:solidFill>
+                  <a:srgbClr val="242A33"/>
+                </a:solidFill>
+                <a:latin typeface="Segoe UI"/>
+                <a:ea typeface="微软雅黑"/>
+              </a:rPr>
+              <a:t>习题与上机题的参考答案，在 </a:t>
+            </a:r>
+            <a:r>
+              <a:rPr sz="1786" b="0" i="0">
+                <a:solidFill>
+                  <a:srgbClr val="242A33"/>
+                </a:solidFill>
+                <a:latin typeface="Consolas"/>
+                <a:ea typeface="Consolas"/>
+              </a:rPr>
+              <a:t>book/习题与参考答案.md</a:t>
             </a:r>
           </a:p>
         </p:txBody>
